--- a/docs/content/regression/regression_activity.pptx
+++ b/docs/content/regression/regression_activity.pptx
@@ -28,6 +28,7 @@
     <p:sldId id="276" r:id="rId22"/>
     <p:sldId id="277" r:id="rId23"/>
     <p:sldId id="278" r:id="rId24"/>
+    <p:sldId id="279" r:id="rId25"/>
   </p:sldIdLst>
   <p:sldSz cx="9144000" cy="5143500" type="screen16x9"/>
   <p:notesSz cx="6858000" cy="9144000"/>
@@ -9895,7 +9896,7 @@
             </a:pPr>
             <a:r>
               <a:rPr/>
-              <a:t>Getting unstuck</a:t>
+              <a:t>Extension — out of class (~30–40 min)</a:t>
             </a:r>
           </a:p>
         </p:txBody>
@@ -9915,42 +9916,107 @@
           <a:bodyPr/>
           <a:lstStyle/>
           <a:p>
+            <a:pPr lvl="0" indent="0" marL="0">
+              <a:buNone/>
+            </a:pPr>
+            <a:r>
+              <a:rPr i="1"/>
+              <a:t>Turn this in with your worksheet. </a:t>
+            </a:r>
+            <a:r>
+              <a:rPr i="1">
+                <a:latin typeface="Courier"/>
+              </a:rPr>
+              <a:t>paper_df</a:t>
+            </a:r>
+            <a:r>
+              <a:rPr i="1"/>
+              <a:t> is the same shared dataset for everyone — this task can’t be copied, because the object is one </a:t>
+            </a:r>
+            <a:r>
+              <a:rPr b="1" i="1"/>
+              <a:t>you</a:t>
+            </a:r>
+            <a:r>
+              <a:rPr i="1"/>
+              <a:t> make.</a:t>
+            </a:r>
+          </a:p>
+          <a:p>
+            <a:pPr lvl="0" indent="0" marL="1270000">
+              <a:buNone/>
+            </a:pPr>
+            <a:r>
+              <a:rPr sz="2000" b="1"/>
+              <a:t>Important</a:t>
+            </a:r>
+          </a:p>
+          <a:p>
+            <a:pPr lvl="0" indent="0" marL="1270000">
+              <a:buNone/>
+            </a:pPr>
+            <a:r>
+              <a:rPr sz="2000" b="1"/>
+              <a:t>E2 and E3 must be handwritten</a:t>
+            </a:r>
+            <a:r>
+              <a:rPr sz="2000"/>
+              <a:t> on paper, photographed, and embedded (</a:t>
+            </a:r>
+            <a:r>
+              <a:rPr sz="2000">
+                <a:latin typeface="Courier"/>
+              </a:rPr>
+              <a:t>![caption](my_photo.jpg)</a:t>
+            </a:r>
+            <a:r>
+              <a:rPr sz="2000"/>
+              <a:t>). Typed answers to E2/E3 get </a:t>
+            </a:r>
+            <a:r>
+              <a:rPr sz="2000" b="1"/>
+              <a:t>at most half credit, even if correct</a:t>
+            </a:r>
+            <a:r>
+              <a:rPr sz="2000"/>
+              <a:t> — I want your own eyeballed prediction and your own reasoning about </a:t>
+            </a:r>
+            <a:r>
+              <a:rPr sz="2000" i="1"/>
+              <a:t>your own</a:t>
+            </a:r>
+            <a:r>
+              <a:rPr sz="2000"/>
+              <a:t> numbers.</a:t>
+            </a:r>
+          </a:p>
+          <a:p>
+            <a:pPr lvl="0" indent="0" marL="0">
+              <a:spcBef>
+                <a:spcPts val="3000"/>
+              </a:spcBef>
+              <a:buNone/>
+            </a:pPr>
+            <a:r>
+              <a:rPr b="1"/>
+              <a:t>E1 · Calibrate an object only you have (4 pts)</a:t>
+            </a:r>
+          </a:p>
+          <a:p>
             <a:pPr lvl="0" indent="-342900" marL="342900">
               <a:buAutoNum type="arabicPeriod"/>
             </a:pPr>
             <a:r>
-              <a:rPr b="1">
-                <a:latin typeface="Courier"/>
-              </a:rPr>
-              <a:t>lm()</a:t>
+              <a:rPr/>
+              <a:t>Cut </a:t>
             </a:r>
             <a:r>
               <a:rPr b="1"/>
-              <a:t> error:</a:t>
-            </a:r>
-            <a:r>
-              <a:rPr/>
-              <a:t> the formula must be </a:t>
-            </a:r>
-            <a:r>
-              <a:rPr>
-                <a:latin typeface="Courier"/>
-              </a:rPr>
-              <a:t>lm(Y ~ X, data)</a:t>
-            </a:r>
-            <a:r>
-              <a:rPr/>
-              <a:t> — response on the left, predictor on the right. Check column names with </a:t>
-            </a:r>
-            <a:r>
-              <a:rPr>
-                <a:latin typeface="Courier"/>
-              </a:rPr>
-              <a:t>names(paper_df)</a:t>
-            </a:r>
-            <a:r>
-              <a:rPr/>
-              <a:t>.</a:t>
+              <a:t>any shape you like</a:t>
+            </a:r>
+            <a:r>
+              <a:rPr/>
+              <a:t> from ordinary printer/notebook paper — trace your hand, your initials in bubble letters, a rough state outline.</a:t>
             </a:r>
           </a:p>
           <a:p>
@@ -9958,38 +10024,8 @@
               <a:buAutoNum type="arabicPeriod"/>
             </a:pPr>
             <a:r>
-              <a:rPr b="1">
-                <a:latin typeface="Courier"/>
-              </a:rPr>
-              <a:t>coef()</a:t>
-            </a:r>
-            <a:r>
-              <a:rPr b="1"/>
-              <a:t> gives two values:</a:t>
-            </a:r>
-            <a:r>
-              <a:rPr/>
-              <a:t> </a:t>
-            </a:r>
-            <a:r>
-              <a:rPr>
-                <a:latin typeface="Courier"/>
-              </a:rPr>
-              <a:t>coef(model)[1]</a:t>
-            </a:r>
-            <a:r>
-              <a:rPr/>
-              <a:t> is the intercept, </a:t>
-            </a:r>
-            <a:r>
-              <a:rPr>
-                <a:latin typeface="Courier"/>
-              </a:rPr>
-              <a:t>coef(model)[2]</a:t>
-            </a:r>
-            <a:r>
-              <a:rPr/>
-              <a:t> is the slope for the first predictor.</a:t>
+              <a:rPr/>
+              <a:t>Weigh it in grams (kitchen or postal scale). No scale? Estimate by comparing to a US penny (2.5 g) or a sheet of printer paper (~4.5 g) and say so.</a:t>
             </a:r>
           </a:p>
           <a:p>
@@ -9997,24 +10033,14 @@
               <a:buAutoNum type="arabicPeriod"/>
             </a:pPr>
             <a:r>
-              <a:rPr b="1">
-                <a:latin typeface="Courier"/>
-              </a:rPr>
-              <a:t>residuals()</a:t>
-            </a:r>
-            <a:r>
-              <a:rPr b="1"/>
-              <a:t> vs raw data:</a:t>
-            </a:r>
-            <a:r>
-              <a:rPr/>
-              <a:t> always apply </a:t>
-            </a:r>
-            <a:r>
-              <a:rPr>
-                <a:latin typeface="Courier"/>
-              </a:rPr>
-              <a:t>shapiro.test()</a:t>
+              <a:rPr/>
+              <a:t>In R, use </a:t>
+            </a:r>
+            <a:r>
+              <a:rPr>
+                <a:latin typeface="Courier"/>
+              </a:rPr>
+              <a:t>paper_lm_model</a:t>
             </a:r>
             <a:r>
               <a:rPr/>
@@ -10024,21 +10050,11 @@
               <a:rPr>
                 <a:latin typeface="Courier"/>
               </a:rPr>
-              <a:t>plot(model)</a:t>
-            </a:r>
-            <a:r>
-              <a:rPr/>
-              <a:t> to the fitted model — the residuals they check come from </a:t>
-            </a:r>
-            <a:r>
-              <a:rPr>
-                <a:latin typeface="Courier"/>
-              </a:rPr>
-              <a:t>residuals(model)</a:t>
-            </a:r>
-            <a:r>
-              <a:rPr/>
-              <a:t>, not the raw Y column.</a:t>
+              <a:t>predict(..., interval = "prediction")</a:t>
+            </a:r>
+            <a:r>
+              <a:rPr/>
+              <a:t> to estimate its area from its mass, with a 95% prediction interval.</a:t>
             </a:r>
           </a:p>
           <a:p>
@@ -10046,38 +10062,86 @@
               <a:buAutoNum type="arabicPeriod"/>
             </a:pPr>
             <a:r>
+              <a:rPr/>
+              <a:t>Measure the </a:t>
+            </a:r>
+            <a:r>
+              <a:rPr b="1"/>
+              <a:t>real</a:t>
+            </a:r>
+            <a:r>
+              <a:rPr/>
+              <a:t> area low-tech: trace onto graph paper and count squares, or approximate with rectangles/triangles you compute by hand.</a:t>
+            </a:r>
+          </a:p>
+          <a:p>
+            <a:pPr lvl="0" indent="0" marL="0">
+              <a:buNone/>
+            </a:pPr>
+            <a:r>
+              <a:rPr/>
+              <a:t>Report: the shape, its mass, the predicted area + interval, your hand-measured area, and whether the real area fell inside the predicted interval.</a:t>
+            </a:r>
+          </a:p>
+          <a:p>
+            <a:pPr lvl="0" indent="0" marL="0">
+              <a:spcBef>
+                <a:spcPts val="3000"/>
+              </a:spcBef>
+              <a:buNone/>
+            </a:pPr>
+            <a:r>
+              <a:rPr b="1"/>
+              <a:t>E2 · Predict, then check — ✍️ by hand (3 pts)</a:t>
+            </a:r>
+          </a:p>
+          <a:p>
+            <a:pPr lvl="0" indent="0" marL="0">
+              <a:buNone/>
+            </a:pPr>
+            <a:r>
+              <a:rPr b="1"/>
+              <a:t>Before running E1’s </a:t>
+            </a:r>
+            <a:r>
               <a:rPr b="1">
                 <a:latin typeface="Courier"/>
               </a:rPr>
               <a:t>predict()</a:t>
             </a:r>
             <a:r>
+              <a:rPr/>
+              <a:t>, look only at your calibration plot from the in-class part. By hand: mark roughly where your shape’s mass sits on the x-axis, sketch where the line puts the area, and write your guessed area range and </a:t>
+            </a:r>
+            <a:r>
+              <a:rPr i="1"/>
+              <a:t>why</a:t>
+            </a:r>
+            <a:r>
+              <a:rPr/>
+              <a:t> (steep/shallow line? near the middle of the data or an edge?). Photograph it. Then run </a:t>
+            </a:r>
+            <a:r>
+              <a:rPr>
+                <a:latin typeface="Courier"/>
+              </a:rPr>
+              <a:t>predict()</a:t>
+            </a:r>
+            <a:r>
+              <a:rPr/>
+              <a:t> and add a line: were you close? What did you misjudge?</a:t>
+            </a:r>
+          </a:p>
+          <a:p>
+            <a:pPr lvl="0" indent="0" marL="0">
+              <a:spcBef>
+                <a:spcPts val="3000"/>
+              </a:spcBef>
+              <a:buNone/>
+            </a:pPr>
+            <a:r>
               <a:rPr b="1"/>
-              <a:t> needs a tibble:</a:t>
-            </a:r>
-            <a:r>
-              <a:rPr/>
-              <a:t> </a:t>
-            </a:r>
-            <a:r>
-              <a:rPr>
-                <a:latin typeface="Courier"/>
-              </a:rPr>
-              <a:t>newdata</a:t>
-            </a:r>
-            <a:r>
-              <a:rPr/>
-              <a:t> must be a data frame or tibble with the exact same column name as the predictor (</a:t>
-            </a:r>
-            <a:r>
-              <a:rPr>
-                <a:latin typeface="Courier"/>
-              </a:rPr>
-              <a:t>mass_g</a:t>
-            </a:r>
-            <a:r>
-              <a:rPr/>
-              <a:t>). A typo here is the most common error.</a:t>
+              <a:t>E3 · Explain it — ✍️ by hand, with YOUR numbers (3 pts)</a:t>
             </a:r>
           </a:p>
           <a:p>
@@ -10085,28 +10149,24 @@
               <a:buAutoNum type="arabicPeriod"/>
             </a:pPr>
             <a:r>
-              <a:rPr b="1">
-                <a:latin typeface="Courier"/>
-              </a:rPr>
-              <a:t>geom_smooth(se = TRUE)</a:t>
+              <a:rPr/>
+              <a:t>Using </a:t>
             </a:r>
             <a:r>
               <a:rPr b="1"/>
-              <a:t> shows confidence band, not prediction interval.</a:t>
-            </a:r>
-            <a:r>
-              <a:rPr/>
-              <a:t> For prediction intervals, use </a:t>
-            </a:r>
-            <a:r>
-              <a:rPr>
-                <a:latin typeface="Courier"/>
-              </a:rPr>
-              <a:t>predict()</a:t>
-            </a:r>
-            <a:r>
-              <a:rPr/>
-              <a:t> manually.</a:t>
+              <a:t>your</a:t>
+            </a:r>
+            <a:r>
+              <a:rPr/>
+              <a:t> R² from the in-class fit, explain in plain language what fraction of the variation in area is explained by mass — and what R² does </a:t>
+            </a:r>
+            <a:r>
+              <a:rPr i="1"/>
+              <a:t>not</a:t>
+            </a:r>
+            <a:r>
+              <a:rPr/>
+              <a:t> tell you about whether the relationship is real or causal.</a:t>
             </a:r>
           </a:p>
           <a:p>
@@ -10114,35 +10174,43 @@
               <a:buAutoNum type="arabicPeriod"/>
             </a:pPr>
             <a:r>
+              <a:rPr/>
+              <a:t>Your </a:t>
+            </a:r>
+            <a:r>
               <a:rPr b="1"/>
-              <a:t>Cheat sheets</a:t>
-            </a:r>
-            <a:r>
-              <a:rPr/>
-              <a:t> — </a:t>
-            </a:r>
-            <a:r>
-              <a:rPr>
-                <a:hlinkClick r:id="rId2"/>
-              </a:rPr>
-              <a:t>https://posit.co/resources/cheatsheets/</a:t>
-            </a:r>
-          </a:p>
-          <a:p>
-            <a:pPr lvl="0" indent="0" marL="1270000">
-              <a:buNone/>
-            </a:pPr>
-            <a:r>
-              <a:rPr sz="2000"/>
-              <a:t>💡 </a:t>
-            </a:r>
-            <a:r>
-              <a:rPr sz="2000" b="1"/>
-              <a:t>Key idea:</a:t>
-            </a:r>
-            <a:r>
-              <a:rPr sz="2000"/>
-              <a:t> Plot it, fit it, check the residuals, interpret the coefficients, then predict — you followed those same five steps for this one calibration curve, and you’ll follow them again, mostly unchanged, the first time you run an ANOVA next module.</a:t>
+              <a:t>prediction</a:t>
+            </a:r>
+            <a:r>
+              <a:rPr/>
+              <a:t> interval in E1 is wider than a </a:t>
+            </a:r>
+            <a:r>
+              <a:rPr b="1"/>
+              <a:t>confidence</a:t>
+            </a:r>
+            <a:r>
+              <a:rPr/>
+              <a:t> interval for the mean area at that mass. Explain why predicting one new object is riskier than estimating an average.</a:t>
+            </a:r>
+          </a:p>
+          <a:p>
+            <a:pPr lvl="0" indent="-342900" marL="342900">
+              <a:buAutoNum type="arabicPeriod"/>
+            </a:pPr>
+            <a:r>
+              <a:rPr/>
+              <a:t>Using </a:t>
+            </a:r>
+            <a:r>
+              <a:rPr>
+                <a:latin typeface="Courier"/>
+              </a:rPr>
+              <a:t>max(paper_df$mass_g)</a:t>
+            </a:r>
+            <a:r>
+              <a:rPr/>
+              <a:t>, explain why extrapolating to a much heavier object (a 5 g cardboard cutout) is a different kind of risk than the interpolation you did in E1.</a:t>
             </a:r>
           </a:p>
         </p:txBody>
@@ -10153,6 +10221,305 @@
 </file>
 
 <file path=ppt/slides/slide23.xml><?xml version="1.0" encoding="utf-8"?>
+<p:sld xmlns:a="http://schemas.openxmlformats.org/drawingml/2006/main" xmlns:r="http://schemas.openxmlformats.org/officeDocument/2006/relationships" xmlns:p="http://schemas.openxmlformats.org/presentationml/2006/main">
+  <p:cSld>
+    <p:spTree>
+      <p:nvGrpSpPr>
+        <p:cNvPr id="1" name=""/>
+        <p:cNvGrpSpPr/>
+        <p:nvPr/>
+      </p:nvGrpSpPr>
+      <p:grpSpPr>
+        <a:xfrm>
+          <a:off x="0" y="0"/>
+          <a:ext cx="0" cy="0"/>
+          <a:chOff x="0" y="0"/>
+          <a:chExt cx="0" cy="0"/>
+        </a:xfrm>
+      </p:grpSpPr>
+      <p:sp>
+        <p:nvSpPr>
+          <p:cNvPr id="2" name="Title 1"/>
+          <p:cNvSpPr>
+            <a:spLocks noGrp="1"/>
+          </p:cNvSpPr>
+          <p:nvPr>
+            <p:ph type="title"/>
+          </p:nvPr>
+        </p:nvSpPr>
+        <p:spPr>
+          <a:xfrm>
+            <a:off x="0" y="0"/>
+            <a:ext cx="9144000" cy="582780"/>
+          </a:xfrm>
+        </p:spPr>
+        <p:txBody>
+          <a:bodyPr/>
+          <a:lstStyle/>
+          <a:p>
+            <a:pPr lvl="0" indent="0" marL="0">
+              <a:buNone/>
+            </a:pPr>
+            <a:r>
+              <a:rPr/>
+              <a:t>Getting unstuck</a:t>
+            </a:r>
+          </a:p>
+        </p:txBody>
+      </p:sp>
+      <p:sp>
+        <p:nvSpPr>
+          <p:cNvPr id="3" name="Content Placeholder 2"/>
+          <p:cNvSpPr>
+            <a:spLocks noGrp="1"/>
+          </p:cNvSpPr>
+          <p:nvPr>
+            <p:ph idx="1"/>
+          </p:nvPr>
+        </p:nvSpPr>
+        <p:spPr/>
+        <p:txBody>
+          <a:bodyPr/>
+          <a:lstStyle/>
+          <a:p>
+            <a:pPr lvl="0" indent="-342900" marL="342900">
+              <a:buAutoNum type="arabicPeriod"/>
+            </a:pPr>
+            <a:r>
+              <a:rPr b="1">
+                <a:latin typeface="Courier"/>
+              </a:rPr>
+              <a:t>lm()</a:t>
+            </a:r>
+            <a:r>
+              <a:rPr b="1"/>
+              <a:t> error:</a:t>
+            </a:r>
+            <a:r>
+              <a:rPr/>
+              <a:t> the formula must be </a:t>
+            </a:r>
+            <a:r>
+              <a:rPr>
+                <a:latin typeface="Courier"/>
+              </a:rPr>
+              <a:t>lm(Y ~ X, data)</a:t>
+            </a:r>
+            <a:r>
+              <a:rPr/>
+              <a:t> — response on the left, predictor on the right. Check column names with </a:t>
+            </a:r>
+            <a:r>
+              <a:rPr>
+                <a:latin typeface="Courier"/>
+              </a:rPr>
+              <a:t>names(paper_df)</a:t>
+            </a:r>
+            <a:r>
+              <a:rPr/>
+              <a:t>.</a:t>
+            </a:r>
+          </a:p>
+          <a:p>
+            <a:pPr lvl="0" indent="-342900" marL="342900">
+              <a:buAutoNum type="arabicPeriod"/>
+            </a:pPr>
+            <a:r>
+              <a:rPr b="1">
+                <a:latin typeface="Courier"/>
+              </a:rPr>
+              <a:t>coef()</a:t>
+            </a:r>
+            <a:r>
+              <a:rPr b="1"/>
+              <a:t> gives two values:</a:t>
+            </a:r>
+            <a:r>
+              <a:rPr/>
+              <a:t> </a:t>
+            </a:r>
+            <a:r>
+              <a:rPr>
+                <a:latin typeface="Courier"/>
+              </a:rPr>
+              <a:t>coef(model)[1]</a:t>
+            </a:r>
+            <a:r>
+              <a:rPr/>
+              <a:t> is the intercept, </a:t>
+            </a:r>
+            <a:r>
+              <a:rPr>
+                <a:latin typeface="Courier"/>
+              </a:rPr>
+              <a:t>coef(model)[2]</a:t>
+            </a:r>
+            <a:r>
+              <a:rPr/>
+              <a:t> is the slope for the first predictor.</a:t>
+            </a:r>
+          </a:p>
+          <a:p>
+            <a:pPr lvl="0" indent="-342900" marL="342900">
+              <a:buAutoNum type="arabicPeriod"/>
+            </a:pPr>
+            <a:r>
+              <a:rPr b="1">
+                <a:latin typeface="Courier"/>
+              </a:rPr>
+              <a:t>residuals()</a:t>
+            </a:r>
+            <a:r>
+              <a:rPr b="1"/>
+              <a:t> vs raw data:</a:t>
+            </a:r>
+            <a:r>
+              <a:rPr/>
+              <a:t> always apply </a:t>
+            </a:r>
+            <a:r>
+              <a:rPr>
+                <a:latin typeface="Courier"/>
+              </a:rPr>
+              <a:t>shapiro.test()</a:t>
+            </a:r>
+            <a:r>
+              <a:rPr/>
+              <a:t> and </a:t>
+            </a:r>
+            <a:r>
+              <a:rPr>
+                <a:latin typeface="Courier"/>
+              </a:rPr>
+              <a:t>plot(model)</a:t>
+            </a:r>
+            <a:r>
+              <a:rPr/>
+              <a:t> to the fitted model — the residuals they check come from </a:t>
+            </a:r>
+            <a:r>
+              <a:rPr>
+                <a:latin typeface="Courier"/>
+              </a:rPr>
+              <a:t>residuals(model)</a:t>
+            </a:r>
+            <a:r>
+              <a:rPr/>
+              <a:t>, not the raw Y column.</a:t>
+            </a:r>
+          </a:p>
+          <a:p>
+            <a:pPr lvl="0" indent="-342900" marL="342900">
+              <a:buAutoNum type="arabicPeriod"/>
+            </a:pPr>
+            <a:r>
+              <a:rPr b="1">
+                <a:latin typeface="Courier"/>
+              </a:rPr>
+              <a:t>predict()</a:t>
+            </a:r>
+            <a:r>
+              <a:rPr b="1"/>
+              <a:t> needs a tibble:</a:t>
+            </a:r>
+            <a:r>
+              <a:rPr/>
+              <a:t> </a:t>
+            </a:r>
+            <a:r>
+              <a:rPr>
+                <a:latin typeface="Courier"/>
+              </a:rPr>
+              <a:t>newdata</a:t>
+            </a:r>
+            <a:r>
+              <a:rPr/>
+              <a:t> must be a data frame or tibble with the exact same column name as the predictor (</a:t>
+            </a:r>
+            <a:r>
+              <a:rPr>
+                <a:latin typeface="Courier"/>
+              </a:rPr>
+              <a:t>mass_g</a:t>
+            </a:r>
+            <a:r>
+              <a:rPr/>
+              <a:t>). A typo here is the most common error.</a:t>
+            </a:r>
+          </a:p>
+          <a:p>
+            <a:pPr lvl="0" indent="-342900" marL="342900">
+              <a:buAutoNum type="arabicPeriod"/>
+            </a:pPr>
+            <a:r>
+              <a:rPr b="1">
+                <a:latin typeface="Courier"/>
+              </a:rPr>
+              <a:t>geom_smooth(se = TRUE)</a:t>
+            </a:r>
+            <a:r>
+              <a:rPr b="1"/>
+              <a:t> shows confidence band, not prediction interval.</a:t>
+            </a:r>
+            <a:r>
+              <a:rPr/>
+              <a:t> For prediction intervals, use </a:t>
+            </a:r>
+            <a:r>
+              <a:rPr>
+                <a:latin typeface="Courier"/>
+              </a:rPr>
+              <a:t>predict()</a:t>
+            </a:r>
+            <a:r>
+              <a:rPr/>
+              <a:t> manually.</a:t>
+            </a:r>
+          </a:p>
+          <a:p>
+            <a:pPr lvl="0" indent="-342900" marL="342900">
+              <a:buAutoNum type="arabicPeriod"/>
+            </a:pPr>
+            <a:r>
+              <a:rPr b="1"/>
+              <a:t>Cheat sheets</a:t>
+            </a:r>
+            <a:r>
+              <a:rPr/>
+              <a:t> — </a:t>
+            </a:r>
+            <a:r>
+              <a:rPr>
+                <a:hlinkClick r:id="rId2"/>
+              </a:rPr>
+              <a:t>https://posit.co/resources/cheatsheets/</a:t>
+            </a:r>
+          </a:p>
+          <a:p>
+            <a:pPr lvl="0" indent="0" marL="1270000">
+              <a:buNone/>
+            </a:pPr>
+            <a:r>
+              <a:rPr sz="2000"/>
+              <a:t>💡 </a:t>
+            </a:r>
+            <a:r>
+              <a:rPr sz="2000" b="1"/>
+              <a:t>Key idea:</a:t>
+            </a:r>
+            <a:r>
+              <a:rPr sz="2000"/>
+              <a:t> Plot it, fit it, check the residuals, interpret the coefficients, then predict — you followed those same five steps for this one calibration curve, and you’ll follow them again, mostly unchanged, the first time you run an ANOVA next module.</a:t>
+            </a:r>
+          </a:p>
+        </p:txBody>
+      </p:sp>
+    </p:spTree>
+  </p:cSld>
+</p:sld>
+</file>
+
+<file path=ppt/slides/slide24.xml><?xml version="1.0" encoding="utf-8"?>
 <p:sld xmlns:a="http://schemas.openxmlformats.org/drawingml/2006/main" xmlns:r="http://schemas.openxmlformats.org/officeDocument/2006/relationships" xmlns:p="http://schemas.openxmlformats.org/presentationml/2006/main">
   <p:cSld>
     <p:spTree>
@@ -10189,7 +10556,7 @@
             </a:pPr>
             <a:r>
               <a:rPr i="1"/>
-              <a:t>End of Worksheet 11. Next: Worksheet 12 — downloading and summarizing real climate data.</a:t>
+              <a:t>End of the Regression worksheet. Next: downloading and summarizing real climate data.</a:t>
             </a:r>
           </a:p>
         </p:txBody>
